--- a/modules/week08/slides-08-triggers.pptx
+++ b/modules/week08/slides-08-triggers.pptx
@@ -17872,7 +17872,7 @@
         <p:spPr/>
         <p:txBody>
           <a:bodyPr>
-            <a:normAutofit fontScale="92500" lnSpcReduction="20000"/>
+            <a:normAutofit fontScale="92500" lnSpcReduction="10000"/>
           </a:bodyPr>
           <a:lstStyle/>
           <a:p>
@@ -17888,7 +17888,7 @@
               </a:rPr>
             </a:br>
             <a:r>
-              <a:rPr lang="en-US">
+              <a:rPr lang="en-US" dirty="0">
                 <a:latin typeface="Courier New" panose="02070309020205020404" pitchFamily="49" charset="0"/>
                 <a:cs typeface="Courier New" panose="02070309020205020404" pitchFamily="49" charset="0"/>
               </a:rPr>
@@ -17926,7 +17926,7 @@
               <a:rPr lang="en-US" dirty="0">
                 <a:latin typeface="Avenir Book" panose="02000503020000020003" pitchFamily="2" charset="0"/>
               </a:rPr>
-              <a:t>It works in this case, but in general (and in your homework, ahem) you will need to be more specific about the row to update.  This is where the primary key comes into play.  A condition placed on the primary key column(s) will uniquely identify any row.</a:t>
+              <a:t>It works in this case, but in general, and for performance reasons, you will need to be more specific about the row to update.  This is where the primary key comes into play.  A condition placed on the primary key column(s) will uniquely and quickly identify any row.</a:t>
             </a:r>
           </a:p>
           <a:p>
@@ -17934,20 +17934,7 @@
               <a:rPr lang="en-US" dirty="0">
                 <a:latin typeface="Avenir Book" panose="02000503020000020003" pitchFamily="2" charset="0"/>
               </a:rPr>
-              <a:t>Another point: triggers (and tables and views and other things) are database constructs; they are stored in the database along with table definitions and the data itself.  You might execute statements by reading them in from a file (e.g., </a:t>
-            </a:r>
-            <a:r>
-              <a:rPr lang="en-US" dirty="0">
-                <a:latin typeface="Courier New" panose="02070309020205020404" pitchFamily="49" charset="0"/>
-                <a:cs typeface="Courier New" panose="02070309020205020404" pitchFamily="49" charset="0"/>
-              </a:rPr>
-              <a:t>.read trigger.sql</a:t>
-            </a:r>
-            <a:r>
-              <a:rPr lang="en-US" dirty="0">
-                <a:latin typeface="Avenir Book" panose="02000503020000020003" pitchFamily="2" charset="0"/>
-              </a:rPr>
-              <a:t>), but it is the execution of those statement that creates persistent structures in the database.</a:t>
+              <a:t>Another point: triggers (and tables and views and other things) are database constructs; they are stored in the database along with table definitions and the data itself.</a:t>
             </a:r>
           </a:p>
         </p:txBody>
